--- a/刘志彪_产业经济学_第15章_产业集聚与产业转移(产业控制力主线精编).pptx
+++ b/刘志彪_产业经济学_第15章_产业集聚与产业转移(产业控制力主线精编).pptx
@@ -9649,22 +9649,7 @@
               </a:spcAft>
             </a:pPr>
             <a:r>
-              <a:rPr b="1" sz="1250">
-                <a:solidFill>
-                  <a:srgbClr val="1E293B"/>
-                </a:solidFill>
-                <a:latin typeface="微软雅黑"/>
-              </a:rPr>
-              <a:t>公式：</a:t>
-            </a:r>
-            <a:r>
-              <a:rPr sz="1250">
-                <a:solidFill>
-                  <a:srgbClr val="1E293B"/>
-                </a:solidFill>
-                <a:latin typeface="宋体"/>
-              </a:rPr>
-              <a:t>LQ = (e_{ij} / e_j) / (E_i / E)。</a:t>
+              <a:t>公式：LQ = (e(ij) / e_j) / (E_i / E)。</a:t>
             </a:r>
           </a:p>
           <a:p>
